--- a/slides/pptx/week16.pptx
+++ b/slides/pptx/week16.pptx
@@ -774,7 +774,8 @@
           <a:p>
             <a:r>
               <a:rPr lang="en-US" dirty="0"/>
-              <a:t>The self-assessment tool for this session: which categories does YOUR capstone actually demonstrate, and which week's lab is the closest precedent to borrow from? The three "deep coverage" rows (A01/A03/A05) had the most lab hours — that's where a team's evidence will be strongest, and a useful nudge for teams still choosing what to build around. ~4 min.</a:t>
+              <a:t>The self-assessment tool for this session: which categories does YOUR capstone actually demonstrate, and which week's lab is the closest precedent to borrow from? The three "deep coverage" rows (A01/A03/A05) had the most lab hours — that's where a team's evidence will be strongest, and a useful nudge for teams still choosing what to build around. ~4 min.
+Diagram: The OWASP Top 10 (2025), each row paired with the week that taught it, the lab file that demonstrated it, and a representative CWE — A01 Broken Access Control (weeks 6, 10, deep coverage), A02 Security Misconfiguration (weeks 13, 2), A03 Software Supply Chain Failures (weeks 12, 15, deep coverage), A04 Cryptographic Failures (week 3), A05 Injection (weeks 4, 5, 2, deep coverage), A06 Insecure Design (week 1), A07 Authentication Failures (week 6), A08 Integrity Failures (week 12), A09 Logging Failures (week 15), A10 Mishandling Exceptional Conditions (week 15) — plus three categories beyond the web Top 10 still graded in the capstone CTF: API1 BOLA (week 10), memory-safety exploitation (week 11), and prompt injection (week 14).</a:t>
             </a:r>
             <a:endParaRPr lang="en-US" dirty="0"/>
           </a:p>
@@ -1589,7 +1590,7 @@
       </p:grpSpPr>
       <p:pic>
         <p:nvPicPr>
-          <p:cNvPr id="2" name="Image 0" descr="/Users/pop7/Library/CloudStorage/OneDrive-MonsterConnectCo.,Ltd/Lecture/KOSEN69 - software-security/slides/pptx/assets/logo-small.png">    </p:cNvPr>
+          <p:cNvPr id="2" name="Image 0" descr="/private/tmp/claude-501/-Users-pop7-Library-CloudStorage-OneDrive-MonsterConnectCo--Ltd-Lecture-KOSEN69---software-security/e6d6556f-17de-403d-a9a0-cf2f846149b4/scratchpad/tree/slides/pptx/assets/logo-small.png">    </p:cNvPr>
           <p:cNvPicPr>
             <a:picLocks noChangeAspect="1"/>
           </p:cNvPicPr>
@@ -2010,7 +2011,7 @@
       </p:sp>
       <p:pic>
         <p:nvPicPr>
-          <p:cNvPr id="8" name="Image 1" descr="/Users/pop7/Library/CloudStorage/OneDrive-MonsterConnectCo.,Ltd/Lecture/KOSEN69 - software-security/slides/pptx/assets/logo-small.png">    </p:cNvPr>
+          <p:cNvPr id="8" name="Image 1" descr="/private/tmp/claude-501/-Users-pop7-Library-CloudStorage-OneDrive-MonsterConnectCo--Ltd-Lecture-KOSEN69---software-security/e6d6556f-17de-403d-a9a0-cf2f846149b4/scratchpad/tree/slides/pptx/assets/logo-small.png">    </p:cNvPr>
           <p:cNvPicPr>
             <a:picLocks noChangeAspect="1"/>
           </p:cNvPicPr>
@@ -2332,7 +2333,7 @@
       </p:sp>
       <p:pic>
         <p:nvPicPr>
-          <p:cNvPr id="8" name="Image 1" descr="/Users/pop7/Library/CloudStorage/OneDrive-MonsterConnectCo.,Ltd/Lecture/KOSEN69 - software-security/slides/pptx/assets/logo-small.png">    </p:cNvPr>
+          <p:cNvPr id="8" name="Image 1" descr="/private/tmp/claude-501/-Users-pop7-Library-CloudStorage-OneDrive-MonsterConnectCo--Ltd-Lecture-KOSEN69---software-security/e6d6556f-17de-403d-a9a0-cf2f846149b4/scratchpad/tree/slides/pptx/assets/logo-small.png">    </p:cNvPr>
           <p:cNvPicPr>
             <a:picLocks noChangeAspect="1"/>
           </p:cNvPicPr>
@@ -2476,50 +2477,33 @@
           </a:p>
         </p:txBody>
       </p:sp>
-      <p:sp>
-        <p:nvSpPr>
-          <p:cNvPr id="5" name="Text 2"/>
-          <p:cNvSpPr/>
-          <p:nvPr/>
-        </p:nvSpPr>
-        <p:spPr>
-          <a:xfrm>
-            <a:off x="548640" y="1325880"/>
-            <a:ext cx="8046720" cy="2743200"/>
-          </a:xfrm>
-          <a:prstGeom prst="rect">
-            <a:avLst/>
-          </a:prstGeom>
-          <a:noFill/>
-          <a:ln/>
-        </p:spPr>
-        <p:txBody>
-          <a:bodyPr wrap="square" lIns="0" tIns="0" rIns="0" bIns="0" rtlCol="0" anchor="t">
-            <a:normAutofit/>
-          </a:bodyPr>
-          <a:lstStyle/>
-          <a:p>
-            <a:pPr indent="0" marL="0">
-              <a:buNone/>
-            </a:pPr>
-            <a:r>
-              <a:rPr lang="en-US" sz="1400" dirty="0">
-                <a:solidFill>
-                  <a:srgbClr val="1F2937"/>
-                </a:solidFill>
-                <a:latin typeface="Calibri" pitchFamily="34" charset="0"/>
-                <a:ea typeface="Calibri" pitchFamily="34" charset="-122"/>
-                <a:cs typeface="Calibri" pitchFamily="34" charset="-120"/>
-              </a:rPr>
-              <a:t>See diagram: The OWASP Top 10 (2025), each row paired with the week that taught it, the lab file that demonstrated it, and a representative CWE — A01 Broken Access Control (weeks 6, 10, deep coverage), A02 Security Misconfiguration (weeks 13, 2), A03 Software Supply Chain Failures (weeks 12, 15, deep coverage), A04 Cryptographic Failures (week 3), A05 Injection (weeks 4, 5, 2, deep coverage), A06 Insecure Design (week 1), A07 Authentication Failures (week 6), A08 Integrity Failures (week 12), A09 Logging Failures (week 15), A10 Mishandling Exceptional Conditions (week 15) — plus three categories beyond the web Top 10 still graded in the capstone CTF: API1 BOLA (week 10), memory-safety exploitation (week 11), and prompt injection (week 14). (web only)</a:t>
-            </a:r>
-            <a:endParaRPr lang="en-US" sz="1400" dirty="0"/>
-          </a:p>
-        </p:txBody>
-      </p:sp>
-      <p:sp>
-        <p:nvSpPr>
-          <p:cNvPr id="6" name="Text 3"/>
+      <p:pic>
+        <p:nvPicPr>
+          <p:cNvPr id="5" name="Image 1" descr="The OWASP Top 10 (2025), each row paired with the week that taught it, the lab file that demonstrated it, and a representative CWE — A01 Broken Access Control (weeks 6, 10, deep coverage), A02 Security Misconfiguration (weeks 13, 2), A03 Software Supply Chain Failures (weeks 12, 15, deep coverage), A04 Cryptographic Failures (week 3), A05 Injection (weeks 4, 5, 2, deep coverage), A06 Insecure Design (week 1), A07 Authentication Failures (week 6), A08 Integrity Failures (week 12), A09 Logging Failures (week 15), A10 Mishandling Exceptional Conditions (week 15) — plus three categories beyond the web Top 10 still graded in the capstone CTF: API1 BOLA (week 10), memory-safety exploitation (week 11), and prompt injection (week 14).">    </p:cNvPr>
+          <p:cNvPicPr>
+            <a:picLocks noChangeAspect="1"/>
+          </p:cNvPicPr>
+          <p:nvPr/>
+        </p:nvPicPr>
+        <p:blipFill>
+          <a:blip r:embed="rId2"/>
+          <a:stretch>
+            <a:fillRect/>
+          </a:stretch>
+        </p:blipFill>
+        <p:spPr>
+          <a:xfrm>
+            <a:off x="2655997" y="1097280"/>
+            <a:ext cx="3832005" cy="3566160"/>
+          </a:xfrm>
+          <a:prstGeom prst="rect">
+            <a:avLst/>
+          </a:prstGeom>
+        </p:spPr>
+      </p:pic>
+      <p:sp>
+        <p:nvSpPr>
+          <p:cNvPr id="6" name="Text 2"/>
           <p:cNvSpPr/>
           <p:nvPr/>
         </p:nvSpPr>
@@ -2558,14 +2542,14 @@
       </p:sp>
       <p:pic>
         <p:nvPicPr>
-          <p:cNvPr id="7" name="Image 1" descr="/Users/pop7/Library/CloudStorage/OneDrive-MonsterConnectCo.,Ltd/Lecture/KOSEN69 - software-security/slides/pptx/assets/logo-small.png">    </p:cNvPr>
+          <p:cNvPr id="7" name="Image 2" descr="/private/tmp/claude-501/-Users-pop7-Library-CloudStorage-OneDrive-MonsterConnectCo--Ltd-Lecture-KOSEN69---software-security/e6d6556f-17de-403d-a9a0-cf2f846149b4/scratchpad/tree/slides/pptx/assets/logo-small.png">    </p:cNvPr>
           <p:cNvPicPr>
             <a:picLocks noChangeAspect="1"/>
           </p:cNvPicPr>
           <p:nvPr/>
         </p:nvPicPr>
         <p:blipFill>
-          <a:blip r:embed="rId2"/>
+          <a:blip r:embed="rId3"/>
           <a:stretch>
             <a:fillRect/>
           </a:stretch>
@@ -2859,7 +2843,7 @@
       </p:sp>
       <p:pic>
         <p:nvPicPr>
-          <p:cNvPr id="8" name="Image 1" descr="/Users/pop7/Library/CloudStorage/OneDrive-MonsterConnectCo.,Ltd/Lecture/KOSEN69 - software-security/slides/pptx/assets/logo-small.png">    </p:cNvPr>
+          <p:cNvPr id="8" name="Image 1" descr="/private/tmp/claude-501/-Users-pop7-Library-CloudStorage-OneDrive-MonsterConnectCo--Ltd-Lecture-KOSEN69---software-security/e6d6556f-17de-403d-a9a0-cf2f846149b4/scratchpad/tree/slides/pptx/assets/logo-small.png">    </p:cNvPr>
           <p:cNvPicPr>
             <a:picLocks noChangeAspect="1"/>
           </p:cNvPicPr>
@@ -3181,7 +3165,7 @@
       </p:sp>
       <p:pic>
         <p:nvPicPr>
-          <p:cNvPr id="8" name="Image 1" descr="/Users/pop7/Library/CloudStorage/OneDrive-MonsterConnectCo.,Ltd/Lecture/KOSEN69 - software-security/slides/pptx/assets/logo-small.png">    </p:cNvPr>
+          <p:cNvPr id="8" name="Image 1" descr="/private/tmp/claude-501/-Users-pop7-Library-CloudStorage-OneDrive-MonsterConnectCo--Ltd-Lecture-KOSEN69---software-security/e6d6556f-17de-403d-a9a0-cf2f846149b4/scratchpad/tree/slides/pptx/assets/logo-small.png">    </p:cNvPr>
           <p:cNvPicPr>
             <a:picLocks noChangeAspect="1"/>
           </p:cNvPicPr>
@@ -3482,7 +3466,7 @@
       </p:sp>
       <p:pic>
         <p:nvPicPr>
-          <p:cNvPr id="8" name="Image 1" descr="/Users/pop7/Library/CloudStorage/OneDrive-MonsterConnectCo.,Ltd/Lecture/KOSEN69 - software-security/slides/pptx/assets/logo-small.png">    </p:cNvPr>
+          <p:cNvPr id="8" name="Image 1" descr="/private/tmp/claude-501/-Users-pop7-Library-CloudStorage-OneDrive-MonsterConnectCo--Ltd-Lecture-KOSEN69---software-security/e6d6556f-17de-403d-a9a0-cf2f846149b4/scratchpad/tree/slides/pptx/assets/logo-small.png">    </p:cNvPr>
           <p:cNvPicPr>
             <a:picLocks noChangeAspect="1"/>
           </p:cNvPicPr>
@@ -3783,7 +3767,7 @@
       </p:sp>
       <p:pic>
         <p:nvPicPr>
-          <p:cNvPr id="8" name="Image 1" descr="/Users/pop7/Library/CloudStorage/OneDrive-MonsterConnectCo.,Ltd/Lecture/KOSEN69 - software-security/slides/pptx/assets/logo-small.png">    </p:cNvPr>
+          <p:cNvPr id="8" name="Image 1" descr="/private/tmp/claude-501/-Users-pop7-Library-CloudStorage-OneDrive-MonsterConnectCo--Ltd-Lecture-KOSEN69---software-security/e6d6556f-17de-403d-a9a0-cf2f846149b4/scratchpad/tree/slides/pptx/assets/logo-small.png">    </p:cNvPr>
           <p:cNvPicPr>
             <a:picLocks noChangeAspect="1"/>
           </p:cNvPicPr>
@@ -3917,7 +3901,7 @@
       </p:sp>
       <p:pic>
         <p:nvPicPr>
-          <p:cNvPr id="4" name="Image 0" descr="/Users/pop7/Library/CloudStorage/OneDrive-MonsterConnectCo.,Ltd/Lecture/KOSEN69 - software-security/slides/pptx/assets/logo-small.png">    </p:cNvPr>
+          <p:cNvPr id="4" name="Image 0" descr="/private/tmp/claude-501/-Users-pop7-Library-CloudStorage-OneDrive-MonsterConnectCo--Ltd-Lecture-KOSEN69---software-security/e6d6556f-17de-403d-a9a0-cf2f846149b4/scratchpad/tree/slides/pptx/assets/logo-small.png">    </p:cNvPr>
           <p:cNvPicPr>
             <a:picLocks noChangeAspect="1"/>
           </p:cNvPicPr>
